--- a/cover-proposals/v39_1013_daiwari_seamless/台割_シームレス版_P02-11_編集用.pptx
+++ b/cover-proposals/v39_1013_daiwari_seamless/台割_シームレス版_P02-11_編集用.pptx
@@ -8210,7 +8210,7 @@
         </p:nvSpPr>
         <p:spPr>
           <a:xfrm>
-            <a:off x="11629032" y="9551397"/>
+            <a:off x="10803171" y="9551397"/>
             <a:ext cx="3808211" cy="247758"/>
           </a:xfrm>
           <a:prstGeom prst="rect">
